--- a/docs/design/dist/d05-erd.pptx
+++ b/docs/design/dist/d05-erd.pptx
@@ -8,6 +8,7 @@
     <p:sldId id="256" r:id="rId7"/>
     <p:sldId id="257" r:id="rId8"/>
     <p:sldId id="258" r:id="rId9"/>
+    <p:sldId id="259" r:id="rId10"/>
   </p:sldIdLst>
   <p:sldSz cx="12192000" cy="6858000" type="screen4x3"/>
   <p:notesSz cx="6858000" cy="9144000"/>
@@ -3161,7 +3162,7 @@
                 <a:ea typeface="Pretendard"/>
                 <a:cs typeface="Pretendard"/>
               </a:rPr>
-              <a:t>KDMS 관리 테이블 논리 ERD (1/3)</a:t>
+              <a:t>KDMS 관리 테이블 ERD (1/4) 한눈에 보기</a:t>
             </a:r>
           </a:p>
         </p:txBody>
@@ -3198,7 +3199,7 @@
                 <a:ea typeface="Pretendard"/>
                 <a:cs typeface="Pretendard"/>
               </a:rPr>
-              <a:t>엔터티·관계·핵심 속성 · 머리 오른쪽은 물리 테이블 이름 · 컬럼·타입 전체는 2·3장 물리 ERD</a:t>
+              <a:t>kdms 스키마 v3 전체를 묶음·상태 값과 함께 요약 · 엔터티 표기는 2장 논리, 3·4장 물리</a:t>
             </a:r>
           </a:p>
         </p:txBody>
@@ -3235,7 +3236,2187 @@
                 <a:ea typeface="Pretendard"/>
                 <a:cs typeface="Pretendard"/>
               </a:rPr>
-              <a:t>KDMS-D05 · v0.3 · 2026-10-09 · 1/3</a:t>
+              <a:t>KDMS-D05 · v0.4 · 2026-10-09 · 1/4</a:t>
+            </a:r>
+          </a:p>
+        </p:txBody>
+      </p:sp>
+      <p:sp>
+        <p:nvSpPr>
+          <p:cNvPr id="6" name="영역 적재 · 기타"/>
+          <p:cNvSpPr/>
+          <p:nvPr/>
+        </p:nvSpPr>
+        <p:spPr>
+          <a:xfrm>
+            <a:off x="335280" y="960120"/>
+            <a:ext cx="3672840" cy="5059680"/>
+          </a:xfrm>
+          <a:prstGeom prst="roundRect">
+            <a:avLst>
+              <a:gd name="adj" fmla="val 3734"/>
+            </a:avLst>
+          </a:prstGeom>
+          <a:solidFill>
+            <a:srgbClr val="EEF8F3"/>
+          </a:solidFill>
+          <a:ln w="10668">
+            <a:solidFill>
+              <a:srgbClr val="9DD3B8"/>
+            </a:solidFill>
+          </a:ln>
+        </p:spPr>
+        <p:txBody>
+          <a:bodyPr rtlCol="0" anchor="t" lIns="167640" tIns="106680" rIns="167640" bIns="0" wrap="none">
+            <a:noAutofit/>
+          </a:bodyPr>
+          <a:lstStyle/>
+          <a:p>
+            <a:pPr algn="l">
+              <a:lnSpc>
+                <a:spcPts val="1560"/>
+              </a:lnSpc>
+            </a:pPr>
+            <a:r>
+              <a:rPr sz="1200" b="1">
+                <a:solidFill>
+                  <a:srgbClr val="0B3D2E"/>
+                </a:solidFill>
+                <a:latin typeface="Pretendard"/>
+                <a:ea typeface="Pretendard"/>
+                <a:cs typeface="Pretendard"/>
+              </a:rPr>
+              <a:t>적재 · 기타</a:t>
+            </a:r>
+          </a:p>
+          <a:p>
+            <a:pPr algn="l">
+              <a:lnSpc>
+                <a:spcPts val="1320"/>
+              </a:lnSpc>
+            </a:pPr>
+            <a:r>
+              <a:rPr sz="1019" b="0">
+                <a:solidFill>
+                  <a:srgbClr val="3F4E61"/>
+                </a:solidFill>
+                <a:latin typeface="Pretendard"/>
+                <a:ea typeface="Pretendard"/>
+                <a:cs typeface="Pretendard"/>
+              </a:rPr>
+              <a:t>3단계 적재 구간, FK 없는 표</a:t>
+            </a:r>
+          </a:p>
+        </p:txBody>
+      </p:sp>
+      <p:sp>
+        <p:nvSpPr>
+          <p:cNvPr id="7" name="영역 작업 · 변경분"/>
+          <p:cNvSpPr/>
+          <p:nvPr/>
+        </p:nvSpPr>
+        <p:spPr>
+          <a:xfrm>
+            <a:off x="4267200" y="960120"/>
+            <a:ext cx="3657600" cy="5059680"/>
+          </a:xfrm>
+          <a:prstGeom prst="roundRect">
+            <a:avLst>
+              <a:gd name="adj" fmla="val 3750"/>
+            </a:avLst>
+          </a:prstGeom>
+          <a:solidFill>
+            <a:srgbClr val="EEF8F3"/>
+          </a:solidFill>
+          <a:ln w="15240">
+            <a:solidFill>
+              <a:srgbClr val="1E6B4F"/>
+            </a:solidFill>
+          </a:ln>
+        </p:spPr>
+        <p:txBody>
+          <a:bodyPr rtlCol="0" anchor="t" lIns="167640" tIns="106680" rIns="167640" bIns="0" wrap="none">
+            <a:noAutofit/>
+          </a:bodyPr>
+          <a:lstStyle/>
+          <a:p>
+            <a:pPr algn="l">
+              <a:lnSpc>
+                <a:spcPts val="1560"/>
+              </a:lnSpc>
+            </a:pPr>
+            <a:r>
+              <a:rPr sz="1200" b="1">
+                <a:solidFill>
+                  <a:srgbClr val="0B3D2E"/>
+                </a:solidFill>
+                <a:latin typeface="Pretendard"/>
+                <a:ea typeface="Pretendard"/>
+                <a:cs typeface="Pretendard"/>
+              </a:rPr>
+              <a:t>작업 · 변경분</a:t>
+            </a:r>
+          </a:p>
+          <a:p>
+            <a:pPr algn="l">
+              <a:lnSpc>
+                <a:spcPts val="1320"/>
+              </a:lnSpc>
+            </a:pPr>
+            <a:r>
+              <a:rPr sz="1019" b="0">
+                <a:solidFill>
+                  <a:srgbClr val="3F4E61"/>
+                </a:solidFill>
+                <a:latin typeface="Pretendard"/>
+                <a:ea typeface="Pretendard"/>
+                <a:cs typeface="Pretendard"/>
+              </a:rPr>
+              <a:t>작업 1건 = 원천 DB 1 → 대상 DB 1</a:t>
+            </a:r>
+          </a:p>
+        </p:txBody>
+      </p:sp>
+      <p:sp>
+        <p:nvSpPr>
+          <p:cNvPr id="8" name="영역 검증 · 전환"/>
+          <p:cNvSpPr/>
+          <p:nvPr/>
+        </p:nvSpPr>
+        <p:spPr>
+          <a:xfrm>
+            <a:off x="8183880" y="960120"/>
+            <a:ext cx="3672840" cy="5059680"/>
+          </a:xfrm>
+          <a:prstGeom prst="roundRect">
+            <a:avLst>
+              <a:gd name="adj" fmla="val 3734"/>
+            </a:avLst>
+          </a:prstGeom>
+          <a:solidFill>
+            <a:srgbClr val="EEF8F3"/>
+          </a:solidFill>
+          <a:ln w="10668">
+            <a:solidFill>
+              <a:srgbClr val="9DD3B8"/>
+            </a:solidFill>
+          </a:ln>
+        </p:spPr>
+        <p:txBody>
+          <a:bodyPr rtlCol="0" anchor="t" lIns="167640" tIns="106680" rIns="167640" bIns="0" wrap="none">
+            <a:noAutofit/>
+          </a:bodyPr>
+          <a:lstStyle/>
+          <a:p>
+            <a:pPr algn="l">
+              <a:lnSpc>
+                <a:spcPts val="1560"/>
+              </a:lnSpc>
+            </a:pPr>
+            <a:r>
+              <a:rPr sz="1200" b="1">
+                <a:solidFill>
+                  <a:srgbClr val="0B3D2E"/>
+                </a:solidFill>
+                <a:latin typeface="Pretendard"/>
+                <a:ea typeface="Pretendard"/>
+                <a:cs typeface="Pretendard"/>
+              </a:rPr>
+              <a:t>검증 · 전환</a:t>
+            </a:r>
+          </a:p>
+          <a:p>
+            <a:pPr algn="l">
+              <a:lnSpc>
+                <a:spcPts val="1320"/>
+              </a:lnSpc>
+            </a:pPr>
+            <a:r>
+              <a:rPr sz="1019" b="0">
+                <a:solidFill>
+                  <a:srgbClr val="3F4E61"/>
+                </a:solidFill>
+                <a:latin typeface="Pretendard"/>
+                <a:ea typeface="Pretendard"/>
+                <a:cs typeface="Pretendard"/>
+              </a:rPr>
+              <a:t>3단계 검증, 5단계 전환 기록</a:t>
+            </a:r>
+          </a:p>
+        </p:txBody>
+      </p:sp>
+      <p:sp>
+        <p:nvSpPr>
+          <p:cNvPr id="9" name="블록 job"/>
+          <p:cNvSpPr/>
+          <p:nvPr/>
+        </p:nvSpPr>
+        <p:spPr>
+          <a:xfrm>
+            <a:off x="4495800" y="1554480"/>
+            <a:ext cx="3200400" cy="685800"/>
+          </a:xfrm>
+          <a:prstGeom prst="roundRect">
+            <a:avLst>
+              <a:gd name="adj" fmla="val 13333"/>
+            </a:avLst>
+          </a:prstGeom>
+          <a:solidFill>
+            <a:srgbClr val="0B3D2E"/>
+          </a:solidFill>
+          <a:ln w="18288">
+            <a:solidFill>
+              <a:srgbClr val="0B3D2E"/>
+            </a:solidFill>
+          </a:ln>
+        </p:spPr>
+        <p:txBody>
+          <a:bodyPr rtlCol="0" anchor="t" lIns="45720" rIns="45720" bIns="0" wrap="none">
+            <a:noAutofit/>
+          </a:bodyPr>
+          <a:lstStyle/>
+          <a:p>
+            <a:pPr algn="ctr">
+              <a:lnSpc>
+                <a:spcPts val="1560"/>
+              </a:lnSpc>
+            </a:pPr>
+            <a:r>
+              <a:rPr sz="1200" b="1">
+                <a:solidFill>
+                  <a:srgbClr val="FFFFFF"/>
+                </a:solidFill>
+                <a:latin typeface="Pretendard"/>
+                <a:ea typeface="Pretendard"/>
+                <a:cs typeface="Pretendard"/>
+              </a:rPr>
+              <a:t>job</a:t>
+            </a:r>
+          </a:p>
+          <a:p>
+            <a:pPr algn="ctr">
+              <a:lnSpc>
+                <a:spcPts val="1320"/>
+              </a:lnSpc>
+            </a:pPr>
+            <a:r>
+              <a:rPr sz="1019" b="0">
+                <a:solidFill>
+                  <a:srgbClr val="FFFFFF"/>
+                </a:solidFill>
+                <a:latin typeface="Pretendard"/>
+                <a:ea typeface="Pretendard"/>
+                <a:cs typeface="Pretendard"/>
+              </a:rPr>
+              <a:t>PK job_id · UK job_name</a:t>
+            </a:r>
+          </a:p>
+          <a:p>
+            <a:pPr algn="ctr">
+              <a:lnSpc>
+                <a:spcPts val="1320"/>
+              </a:lnSpc>
+            </a:pPr>
+            <a:r>
+              <a:rPr sz="1019" b="0">
+                <a:solidFill>
+                  <a:srgbClr val="FFFFFF"/>
+                </a:solidFill>
+                <a:latin typeface="Pretendard"/>
+                <a:ea typeface="Pretendard"/>
+                <a:cs typeface="Pretendard"/>
+              </a:rPr>
+              <a:t>status · config_sha256 · last_error</a:t>
+            </a:r>
+          </a:p>
+        </p:txBody>
+      </p:sp>
+      <p:sp>
+        <p:nvSpPr>
+          <p:cNvPr id="10" name="블록 watermark"/>
+          <p:cNvSpPr/>
+          <p:nvPr/>
+        </p:nvSpPr>
+        <p:spPr>
+          <a:xfrm>
+            <a:off x="4465320" y="2682240"/>
+            <a:ext cx="1036320" cy="685800"/>
+          </a:xfrm>
+          <a:prstGeom prst="roundRect">
+            <a:avLst>
+              <a:gd name="adj" fmla="val 13333"/>
+            </a:avLst>
+          </a:prstGeom>
+          <a:solidFill>
+            <a:srgbClr val="FFFFFF"/>
+          </a:solidFill>
+          <a:ln w="13716">
+            <a:solidFill>
+              <a:srgbClr val="9DD3B8"/>
+            </a:solidFill>
+          </a:ln>
+        </p:spPr>
+        <p:txBody>
+          <a:bodyPr rtlCol="0" anchor="t" lIns="45720" rIns="45720" bIns="0" wrap="none">
+            <a:noAutofit/>
+          </a:bodyPr>
+          <a:lstStyle/>
+          <a:p>
+            <a:pPr algn="ctr">
+              <a:lnSpc>
+                <a:spcPts val="1560"/>
+              </a:lnSpc>
+            </a:pPr>
+            <a:r>
+              <a:rPr sz="1200" b="1">
+                <a:solidFill>
+                  <a:srgbClr val="0B3D2E"/>
+                </a:solidFill>
+                <a:latin typeface="Pretendard"/>
+                <a:ea typeface="Pretendard"/>
+                <a:cs typeface="Pretendard"/>
+              </a:rPr>
+              <a:t>watermark</a:t>
+            </a:r>
+          </a:p>
+          <a:p>
+            <a:pPr algn="ctr">
+              <a:lnSpc>
+                <a:spcPts val="1320"/>
+              </a:lnSpc>
+            </a:pPr>
+            <a:r>
+              <a:rPr sz="1019" b="0">
+                <a:solidFill>
+                  <a:srgbClr val="3F4E61"/>
+                </a:solidFill>
+                <a:latin typeface="Pretendard"/>
+                <a:ea typeface="Pretendard"/>
+                <a:cs typeface="Pretendard"/>
+              </a:rPr>
+              <a:t>PK = job_id</a:t>
+            </a:r>
+          </a:p>
+          <a:p>
+            <a:pPr algn="ctr">
+              <a:lnSpc>
+                <a:spcPts val="1320"/>
+              </a:lnSpc>
+            </a:pPr>
+            <a:r>
+              <a:rPr sz="1019" b="0">
+                <a:solidFill>
+                  <a:srgbClr val="3F4E61"/>
+                </a:solidFill>
+                <a:latin typeface="Pretendard"/>
+                <a:ea typeface="Pretendard"/>
+                <a:cs typeface="Pretendard"/>
+              </a:rPr>
+              <a:t>LSN · 지연</a:t>
+            </a:r>
+          </a:p>
+        </p:txBody>
+      </p:sp>
+      <p:sp>
+        <p:nvSpPr>
+          <p:cNvPr id="11" name="블록 change_log"/>
+          <p:cNvSpPr/>
+          <p:nvPr/>
+        </p:nvSpPr>
+        <p:spPr>
+          <a:xfrm>
+            <a:off x="5577840" y="2682240"/>
+            <a:ext cx="1036320" cy="685800"/>
+          </a:xfrm>
+          <a:prstGeom prst="roundRect">
+            <a:avLst>
+              <a:gd name="adj" fmla="val 13333"/>
+            </a:avLst>
+          </a:prstGeom>
+          <a:solidFill>
+            <a:srgbClr val="FFFFFF"/>
+          </a:solidFill>
+          <a:ln w="13716">
+            <a:solidFill>
+              <a:srgbClr val="9DD3B8"/>
+            </a:solidFill>
+          </a:ln>
+        </p:spPr>
+        <p:txBody>
+          <a:bodyPr rtlCol="0" anchor="t" lIns="45720" rIns="45720" bIns="0" wrap="none">
+            <a:noAutofit/>
+          </a:bodyPr>
+          <a:lstStyle/>
+          <a:p>
+            <a:pPr algn="ctr">
+              <a:lnSpc>
+                <a:spcPts val="1560"/>
+              </a:lnSpc>
+            </a:pPr>
+            <a:r>
+              <a:rPr sz="1200" b="1">
+                <a:solidFill>
+                  <a:srgbClr val="0B3D2E"/>
+                </a:solidFill>
+                <a:latin typeface="Pretendard"/>
+                <a:ea typeface="Pretendard"/>
+                <a:cs typeface="Pretendard"/>
+              </a:rPr>
+              <a:t>change_log</a:t>
+            </a:r>
+          </a:p>
+          <a:p>
+            <a:pPr algn="ctr">
+              <a:lnSpc>
+                <a:spcPts val="1320"/>
+              </a:lnSpc>
+            </a:pPr>
+            <a:r>
+              <a:rPr sz="1019" b="0">
+                <a:solidFill>
+                  <a:srgbClr val="3F4E61"/>
+                </a:solidFill>
+                <a:latin typeface="Pretendard"/>
+                <a:ea typeface="Pretendard"/>
+                <a:cs typeface="Pretendard"/>
+              </a:rPr>
+              <a:t>반영 전 변경</a:t>
+            </a:r>
+          </a:p>
+          <a:p>
+            <a:pPr algn="ctr">
+              <a:lnSpc>
+                <a:spcPts val="1320"/>
+              </a:lnSpc>
+            </a:pPr>
+            <a:r>
+              <a:rPr sz="1019" b="0">
+                <a:solidFill>
+                  <a:srgbClr val="3F4E61"/>
+                </a:solidFill>
+                <a:latin typeface="Pretendard"/>
+                <a:ea typeface="Pretendard"/>
+                <a:cs typeface="Pretendard"/>
+              </a:rPr>
+              <a:t>반영 뒤 삭제</a:t>
+            </a:r>
+          </a:p>
+        </p:txBody>
+      </p:sp>
+      <p:sp>
+        <p:nvSpPr>
+          <p:cNvPr id="12" name="블록 event_log"/>
+          <p:cNvSpPr/>
+          <p:nvPr/>
+        </p:nvSpPr>
+        <p:spPr>
+          <a:xfrm>
+            <a:off x="6690360" y="2682240"/>
+            <a:ext cx="1036320" cy="685800"/>
+          </a:xfrm>
+          <a:prstGeom prst="roundRect">
+            <a:avLst>
+              <a:gd name="adj" fmla="val 13333"/>
+            </a:avLst>
+          </a:prstGeom>
+          <a:solidFill>
+            <a:srgbClr val="FFFFFF"/>
+          </a:solidFill>
+          <a:ln w="13716">
+            <a:solidFill>
+              <a:srgbClr val="9DD3B8"/>
+            </a:solidFill>
+          </a:ln>
+        </p:spPr>
+        <p:txBody>
+          <a:bodyPr rtlCol="0" anchor="t" lIns="45720" rIns="45720" bIns="0" wrap="none">
+            <a:noAutofit/>
+          </a:bodyPr>
+          <a:lstStyle/>
+          <a:p>
+            <a:pPr algn="ctr">
+              <a:lnSpc>
+                <a:spcPts val="1560"/>
+              </a:lnSpc>
+            </a:pPr>
+            <a:r>
+              <a:rPr sz="1200" b="1">
+                <a:solidFill>
+                  <a:srgbClr val="0B3D2E"/>
+                </a:solidFill>
+                <a:latin typeface="Pretendard"/>
+                <a:ea typeface="Pretendard"/>
+                <a:cs typeface="Pretendard"/>
+              </a:rPr>
+              <a:t>event_log</a:t>
+            </a:r>
+          </a:p>
+          <a:p>
+            <a:pPr algn="ctr">
+              <a:lnSpc>
+                <a:spcPts val="1320"/>
+              </a:lnSpc>
+            </a:pPr>
+            <a:r>
+              <a:rPr sz="1019" b="0">
+                <a:solidFill>
+                  <a:srgbClr val="3F4E61"/>
+                </a:solidFill>
+                <a:latin typeface="Pretendard"/>
+                <a:ea typeface="Pretendard"/>
+                <a:cs typeface="Pretendard"/>
+              </a:rPr>
+              <a:t>단계 기록</a:t>
+            </a:r>
+          </a:p>
+          <a:p>
+            <a:pPr algn="ctr">
+              <a:lnSpc>
+                <a:spcPts val="1320"/>
+              </a:lnSpc>
+            </a:pPr>
+            <a:r>
+              <a:rPr sz="1019" b="0">
+                <a:solidFill>
+                  <a:srgbClr val="3F4E61"/>
+                </a:solidFill>
+                <a:latin typeface="Pretendard"/>
+                <a:ea typeface="Pretendard"/>
+                <a:cs typeface="Pretendard"/>
+              </a:rPr>
+              <a:t>행 값 없음</a:t>
+            </a:r>
+          </a:p>
+        </p:txBody>
+      </p:sp>
+      <p:sp>
+        <p:nvSpPr>
+          <p:cNvPr id="13" name="블록 job.status"/>
+          <p:cNvSpPr/>
+          <p:nvPr/>
+        </p:nvSpPr>
+        <p:spPr>
+          <a:xfrm>
+            <a:off x="4495800" y="3810000"/>
+            <a:ext cx="3200400" cy="685800"/>
+          </a:xfrm>
+          <a:prstGeom prst="roundRect">
+            <a:avLst>
+              <a:gd name="adj" fmla="val 13333"/>
+            </a:avLst>
+          </a:prstGeom>
+          <a:solidFill>
+            <a:srgbClr val="D5EFE2"/>
+          </a:solidFill>
+          <a:ln w="16764">
+            <a:solidFill>
+              <a:srgbClr val="1E6B4F"/>
+            </a:solidFill>
+          </a:ln>
+        </p:spPr>
+        <p:txBody>
+          <a:bodyPr rtlCol="0" anchor="t" lIns="45720" rIns="45720" bIns="0" wrap="none">
+            <a:noAutofit/>
+          </a:bodyPr>
+          <a:lstStyle/>
+          <a:p>
+            <a:pPr algn="ctr">
+              <a:lnSpc>
+                <a:spcPts val="1560"/>
+              </a:lnSpc>
+            </a:pPr>
+            <a:r>
+              <a:rPr sz="1200" b="1">
+                <a:solidFill>
+                  <a:srgbClr val="0B3D2E"/>
+                </a:solidFill>
+                <a:latin typeface="Pretendard"/>
+                <a:ea typeface="Pretendard"/>
+                <a:cs typeface="Pretendard"/>
+              </a:rPr>
+              <a:t>job.status</a:t>
+            </a:r>
+          </a:p>
+          <a:p>
+            <a:pPr algn="ctr">
+              <a:lnSpc>
+                <a:spcPts val="1320"/>
+              </a:lnSpc>
+            </a:pPr>
+            <a:r>
+              <a:rPr sz="1019" b="0">
+                <a:solidFill>
+                  <a:srgbClr val="16202C"/>
+                </a:solidFill>
+                <a:latin typeface="Pretendard"/>
+                <a:ea typeface="Pretendard"/>
+                <a:cs typeface="Pretendard"/>
+              </a:rPr>
+              <a:t>SCHEMA_DONE → LOADING → SYNCING</a:t>
+            </a:r>
+          </a:p>
+          <a:p>
+            <a:pPr algn="ctr">
+              <a:lnSpc>
+                <a:spcPts val="1320"/>
+              </a:lnSpc>
+            </a:pPr>
+            <a:r>
+              <a:rPr sz="1019" b="0">
+                <a:solidFill>
+                  <a:srgbClr val="16202C"/>
+                </a:solidFill>
+                <a:latin typeface="Pretendard"/>
+                <a:ea typeface="Pretendard"/>
+                <a:cs typeface="Pretendard"/>
+              </a:rPr>
+              <a:t>→ CUTOVER → VERIFIED → DONE · FAILED</a:t>
+            </a:r>
+          </a:p>
+        </p:txBody>
+      </p:sp>
+      <p:sp>
+        <p:nvSpPr>
+          <p:cNvPr id="14" name="블록 job_table.status"/>
+          <p:cNvSpPr/>
+          <p:nvPr/>
+        </p:nvSpPr>
+        <p:spPr>
+          <a:xfrm>
+            <a:off x="4495800" y="4876800"/>
+            <a:ext cx="3200400" cy="685800"/>
+          </a:xfrm>
+          <a:prstGeom prst="roundRect">
+            <a:avLst>
+              <a:gd name="adj" fmla="val 13333"/>
+            </a:avLst>
+          </a:prstGeom>
+          <a:solidFill>
+            <a:srgbClr val="D5EFE2"/>
+          </a:solidFill>
+          <a:ln w="16764">
+            <a:solidFill>
+              <a:srgbClr val="1E6B4F"/>
+            </a:solidFill>
+          </a:ln>
+        </p:spPr>
+        <p:txBody>
+          <a:bodyPr rtlCol="0" anchor="t" lIns="45720" rIns="45720" bIns="0" wrap="none">
+            <a:noAutofit/>
+          </a:bodyPr>
+          <a:lstStyle/>
+          <a:p>
+            <a:pPr algn="ctr">
+              <a:lnSpc>
+                <a:spcPts val="1560"/>
+              </a:lnSpc>
+            </a:pPr>
+            <a:r>
+              <a:rPr sz="1200" b="1">
+                <a:solidFill>
+                  <a:srgbClr val="0B3D2E"/>
+                </a:solidFill>
+                <a:latin typeface="Pretendard"/>
+                <a:ea typeface="Pretendard"/>
+                <a:cs typeface="Pretendard"/>
+              </a:rPr>
+              <a:t>job_table.status</a:t>
+            </a:r>
+          </a:p>
+          <a:p>
+            <a:pPr algn="ctr">
+              <a:lnSpc>
+                <a:spcPts val="1320"/>
+              </a:lnSpc>
+            </a:pPr>
+            <a:r>
+              <a:rPr sz="1019" b="0">
+                <a:solidFill>
+                  <a:srgbClr val="16202C"/>
+                </a:solidFill>
+                <a:latin typeface="Pretendard"/>
+                <a:ea typeface="Pretendard"/>
+                <a:cs typeface="Pretendard"/>
+              </a:rPr>
+              <a:t>PENDING → LOADING → LOADED</a:t>
+            </a:r>
+          </a:p>
+          <a:p>
+            <a:pPr algn="ctr">
+              <a:lnSpc>
+                <a:spcPts val="1320"/>
+              </a:lnSpc>
+            </a:pPr>
+            <a:r>
+              <a:rPr sz="1019" b="0">
+                <a:solidFill>
+                  <a:srgbClr val="16202C"/>
+                </a:solidFill>
+                <a:latin typeface="Pretendard"/>
+                <a:ea typeface="Pretendard"/>
+                <a:cs typeface="Pretendard"/>
+              </a:rPr>
+              <a:t>구간 실패 → FAILED → 다시 LOADING</a:t>
+            </a:r>
+          </a:p>
+        </p:txBody>
+      </p:sp>
+      <p:sp>
+        <p:nvSpPr>
+          <p:cNvPr id="15" name="블록 job_table"/>
+          <p:cNvSpPr/>
+          <p:nvPr/>
+        </p:nvSpPr>
+        <p:spPr>
+          <a:xfrm>
+            <a:off x="563880" y="1554480"/>
+            <a:ext cx="3215640" cy="685800"/>
+          </a:xfrm>
+          <a:prstGeom prst="roundRect">
+            <a:avLst>
+              <a:gd name="adj" fmla="val 13333"/>
+            </a:avLst>
+          </a:prstGeom>
+          <a:solidFill>
+            <a:srgbClr val="FFFFFF"/>
+          </a:solidFill>
+          <a:ln w="13716">
+            <a:solidFill>
+              <a:srgbClr val="9DD3B8"/>
+            </a:solidFill>
+          </a:ln>
+        </p:spPr>
+        <p:txBody>
+          <a:bodyPr rtlCol="0" anchor="t" lIns="45720" rIns="45720" bIns="0" wrap="none">
+            <a:noAutofit/>
+          </a:bodyPr>
+          <a:lstStyle/>
+          <a:p>
+            <a:pPr algn="ctr">
+              <a:lnSpc>
+                <a:spcPts val="1560"/>
+              </a:lnSpc>
+            </a:pPr>
+            <a:r>
+              <a:rPr sz="1200" b="1">
+                <a:solidFill>
+                  <a:srgbClr val="0B3D2E"/>
+                </a:solidFill>
+                <a:latin typeface="Pretendard"/>
+                <a:ea typeface="Pretendard"/>
+                <a:cs typeface="Pretendard"/>
+              </a:rPr>
+              <a:t>job_table</a:t>
+            </a:r>
+          </a:p>
+          <a:p>
+            <a:pPr algn="ctr">
+              <a:lnSpc>
+                <a:spcPts val="1320"/>
+              </a:lnSpc>
+            </a:pPr>
+            <a:r>
+              <a:rPr sz="1019" b="0">
+                <a:solidFill>
+                  <a:srgbClr val="3F4E61"/>
+                </a:solidFill>
+                <a:latin typeface="Pretendard"/>
+                <a:ea typeface="Pretendard"/>
+                <a:cs typeface="Pretendard"/>
+              </a:rPr>
+              <a:t>PK job_table_id · FK job_id</a:t>
+            </a:r>
+          </a:p>
+          <a:p>
+            <a:pPr algn="ctr">
+              <a:lnSpc>
+                <a:spcPts val="1320"/>
+              </a:lnSpc>
+            </a:pPr>
+            <a:r>
+              <a:rPr sz="1019" b="0">
+                <a:solidFill>
+                  <a:srgbClr val="3F4E61"/>
+                </a:solidFill>
+                <a:latin typeface="Pretendard"/>
+                <a:ea typeface="Pretendard"/>
+                <a:cs typeface="Pretendard"/>
+              </a:rPr>
+              <a:t>status · 테이블별 반영 위치(LSN)</a:t>
+            </a:r>
+          </a:p>
+        </p:txBody>
+      </p:sp>
+      <p:sp>
+        <p:nvSpPr>
+          <p:cNvPr id="16" name="블록 load_chunk"/>
+          <p:cNvSpPr/>
+          <p:nvPr/>
+        </p:nvSpPr>
+        <p:spPr>
+          <a:xfrm>
+            <a:off x="563880" y="2682240"/>
+            <a:ext cx="3215640" cy="685800"/>
+          </a:xfrm>
+          <a:prstGeom prst="roundRect">
+            <a:avLst>
+              <a:gd name="adj" fmla="val 13333"/>
+            </a:avLst>
+          </a:prstGeom>
+          <a:solidFill>
+            <a:srgbClr val="FFFFFF"/>
+          </a:solidFill>
+          <a:ln w="13716">
+            <a:solidFill>
+              <a:srgbClr val="9DD3B8"/>
+            </a:solidFill>
+          </a:ln>
+        </p:spPr>
+        <p:txBody>
+          <a:bodyPr rtlCol="0" anchor="t" lIns="45720" rIns="45720" bIns="0" wrap="none">
+            <a:noAutofit/>
+          </a:bodyPr>
+          <a:lstStyle/>
+          <a:p>
+            <a:pPr algn="ctr">
+              <a:lnSpc>
+                <a:spcPts val="1560"/>
+              </a:lnSpc>
+            </a:pPr>
+            <a:r>
+              <a:rPr sz="1200" b="1">
+                <a:solidFill>
+                  <a:srgbClr val="0B3D2E"/>
+                </a:solidFill>
+                <a:latin typeface="Pretendard"/>
+                <a:ea typeface="Pretendard"/>
+                <a:cs typeface="Pretendard"/>
+              </a:rPr>
+              <a:t>load_chunk</a:t>
+            </a:r>
+          </a:p>
+          <a:p>
+            <a:pPr algn="ctr">
+              <a:lnSpc>
+                <a:spcPts val="1320"/>
+              </a:lnSpc>
+            </a:pPr>
+            <a:r>
+              <a:rPr sz="1019" b="0">
+                <a:solidFill>
+                  <a:srgbClr val="3F4E61"/>
+                </a:solidFill>
+                <a:latin typeface="Pretendard"/>
+                <a:ea typeface="Pretendard"/>
+                <a:cs typeface="Pretendard"/>
+              </a:rPr>
+              <a:t>PK chunk_id · FK job_table_id</a:t>
+            </a:r>
+          </a:p>
+          <a:p>
+            <a:pPr algn="ctr">
+              <a:lnSpc>
+                <a:spcPts val="1320"/>
+              </a:lnSpc>
+            </a:pPr>
+            <a:r>
+              <a:rPr sz="1019" b="0">
+                <a:solidFill>
+                  <a:srgbClr val="3F4E61"/>
+                </a:solidFill>
+                <a:latin typeface="Pretendard"/>
+                <a:ea typeface="Pretendard"/>
+                <a:cs typeface="Pretendard"/>
+              </a:rPr>
+              <a:t>구간 상·하한(jsonb) · status</a:t>
+            </a:r>
+          </a:p>
+        </p:txBody>
+      </p:sp>
+      <p:sp>
+        <p:nvSpPr>
+          <p:cNvPr id="17" name="블록 schema_version"/>
+          <p:cNvSpPr/>
+          <p:nvPr/>
+        </p:nvSpPr>
+        <p:spPr>
+          <a:xfrm>
+            <a:off x="563880" y="3810000"/>
+            <a:ext cx="3215640" cy="685800"/>
+          </a:xfrm>
+          <a:prstGeom prst="roundRect">
+            <a:avLst>
+              <a:gd name="adj" fmla="val 13333"/>
+            </a:avLst>
+          </a:prstGeom>
+          <a:solidFill>
+            <a:srgbClr val="FFFFFF"/>
+          </a:solidFill>
+          <a:ln w="13716">
+            <a:solidFill>
+              <a:srgbClr val="9DD3B8"/>
+            </a:solidFill>
+          </a:ln>
+        </p:spPr>
+        <p:txBody>
+          <a:bodyPr rtlCol="0" anchor="t" lIns="45720" rIns="45720" bIns="0" wrap="none">
+            <a:noAutofit/>
+          </a:bodyPr>
+          <a:lstStyle/>
+          <a:p>
+            <a:pPr algn="ctr">
+              <a:lnSpc>
+                <a:spcPts val="1560"/>
+              </a:lnSpc>
+            </a:pPr>
+            <a:r>
+              <a:rPr sz="1200" b="1">
+                <a:solidFill>
+                  <a:srgbClr val="0B3D2E"/>
+                </a:solidFill>
+                <a:latin typeface="Pretendard"/>
+                <a:ea typeface="Pretendard"/>
+                <a:cs typeface="Pretendard"/>
+              </a:rPr>
+              <a:t>schema_version</a:t>
+            </a:r>
+          </a:p>
+          <a:p>
+            <a:pPr algn="ctr">
+              <a:lnSpc>
+                <a:spcPts val="1320"/>
+              </a:lnSpc>
+            </a:pPr>
+            <a:r>
+              <a:rPr sz="1019" b="0">
+                <a:solidFill>
+                  <a:srgbClr val="3F4E61"/>
+                </a:solidFill>
+                <a:latin typeface="Pretendard"/>
+                <a:ea typeface="Pretendard"/>
+                <a:cs typeface="Pretendard"/>
+              </a:rPr>
+              <a:t>적용한 관리 스키마 버전 1 · 2 · 3</a:t>
+            </a:r>
+          </a:p>
+          <a:p>
+            <a:pPr algn="ctr">
+              <a:lnSpc>
+                <a:spcPts val="1320"/>
+              </a:lnSpc>
+            </a:pPr>
+            <a:r>
+              <a:rPr sz="1019" b="0">
+                <a:solidFill>
+                  <a:srgbClr val="3F4E61"/>
+                </a:solidFill>
+                <a:latin typeface="Pretendard"/>
+                <a:ea typeface="Pretendard"/>
+                <a:cs typeface="Pretendard"/>
+              </a:rPr>
+              <a:t>FK 없음</a:t>
+            </a:r>
+          </a:p>
+        </p:txBody>
+      </p:sp>
+      <p:sp>
+        <p:nvSpPr>
+          <p:cNvPr id="18" name="블록 debezium_offset · schema_history"/>
+          <p:cNvSpPr/>
+          <p:nvPr/>
+        </p:nvSpPr>
+        <p:spPr>
+          <a:xfrm>
+            <a:off x="563880" y="4876800"/>
+            <a:ext cx="3215640" cy="685800"/>
+          </a:xfrm>
+          <a:prstGeom prst="roundRect">
+            <a:avLst>
+              <a:gd name="adj" fmla="val 13333"/>
+            </a:avLst>
+          </a:prstGeom>
+          <a:solidFill>
+            <a:srgbClr val="FFFFFF"/>
+          </a:solidFill>
+          <a:ln w="13716">
+            <a:solidFill>
+              <a:srgbClr val="9DD3B8"/>
+            </a:solidFill>
+          </a:ln>
+        </p:spPr>
+        <p:txBody>
+          <a:bodyPr rtlCol="0" anchor="t" lIns="45720" rIns="45720" bIns="0" wrap="none">
+            <a:noAutofit/>
+          </a:bodyPr>
+          <a:lstStyle/>
+          <a:p>
+            <a:pPr algn="ctr">
+              <a:lnSpc>
+                <a:spcPts val="1560"/>
+              </a:lnSpc>
+            </a:pPr>
+            <a:r>
+              <a:rPr sz="1200" b="1">
+                <a:solidFill>
+                  <a:srgbClr val="0B3D2E"/>
+                </a:solidFill>
+                <a:latin typeface="Pretendard"/>
+                <a:ea typeface="Pretendard"/>
+                <a:cs typeface="Pretendard"/>
+              </a:rPr>
+              <a:t>debezium_offset · schema_history</a:t>
+            </a:r>
+          </a:p>
+          <a:p>
+            <a:pPr algn="ctr">
+              <a:lnSpc>
+                <a:spcPts val="1320"/>
+              </a:lnSpc>
+            </a:pPr>
+            <a:r>
+              <a:rPr sz="1019" b="0">
+                <a:solidFill>
+                  <a:srgbClr val="3F4E61"/>
+                </a:solidFill>
+                <a:latin typeface="Pretendard"/>
+                <a:ea typeface="Pretendard"/>
+                <a:cs typeface="Pretendard"/>
+              </a:rPr>
+              <a:t>Debezium 이 만든다 · 작업마다 따로</a:t>
+            </a:r>
+          </a:p>
+          <a:p>
+            <a:pPr algn="ctr">
+              <a:lnSpc>
+                <a:spcPts val="1320"/>
+              </a:lnSpc>
+            </a:pPr>
+            <a:r>
+              <a:rPr sz="1019" b="0">
+                <a:solidFill>
+                  <a:srgbClr val="3F4E61"/>
+                </a:solidFill>
+                <a:latin typeface="Pretendard"/>
+                <a:ea typeface="Pretendard"/>
+                <a:cs typeface="Pretendard"/>
+              </a:rPr>
+              <a:t>FK 없음 · reset 이 지운다</a:t>
+            </a:r>
+          </a:p>
+        </p:txBody>
+      </p:sp>
+      <p:sp>
+        <p:nvSpPr>
+          <p:cNvPr id="19" name="블록 verify_run"/>
+          <p:cNvSpPr/>
+          <p:nvPr/>
+        </p:nvSpPr>
+        <p:spPr>
+          <a:xfrm>
+            <a:off x="8412480" y="1554480"/>
+            <a:ext cx="3215640" cy="685800"/>
+          </a:xfrm>
+          <a:prstGeom prst="roundRect">
+            <a:avLst>
+              <a:gd name="adj" fmla="val 13333"/>
+            </a:avLst>
+          </a:prstGeom>
+          <a:solidFill>
+            <a:srgbClr val="FFFFFF"/>
+          </a:solidFill>
+          <a:ln w="13716">
+            <a:solidFill>
+              <a:srgbClr val="9DD3B8"/>
+            </a:solidFill>
+          </a:ln>
+        </p:spPr>
+        <p:txBody>
+          <a:bodyPr rtlCol="0" anchor="t" lIns="45720" rIns="45720" bIns="0" wrap="none">
+            <a:noAutofit/>
+          </a:bodyPr>
+          <a:lstStyle/>
+          <a:p>
+            <a:pPr algn="ctr">
+              <a:lnSpc>
+                <a:spcPts val="1560"/>
+              </a:lnSpc>
+            </a:pPr>
+            <a:r>
+              <a:rPr sz="1200" b="1">
+                <a:solidFill>
+                  <a:srgbClr val="0B3D2E"/>
+                </a:solidFill>
+                <a:latin typeface="Pretendard"/>
+                <a:ea typeface="Pretendard"/>
+                <a:cs typeface="Pretendard"/>
+              </a:rPr>
+              <a:t>verify_run</a:t>
+            </a:r>
+          </a:p>
+          <a:p>
+            <a:pPr algn="ctr">
+              <a:lnSpc>
+                <a:spcPts val="1320"/>
+              </a:lnSpc>
+            </a:pPr>
+            <a:r>
+              <a:rPr sz="1019" b="0">
+                <a:solidFill>
+                  <a:srgbClr val="3F4E61"/>
+                </a:solidFill>
+                <a:latin typeface="Pretendard"/>
+                <a:ea typeface="Pretendard"/>
+                <a:cs typeface="Pretendard"/>
+              </a:rPr>
+              <a:t>PK run_id · FK job_id</a:t>
+            </a:r>
+          </a:p>
+          <a:p>
+            <a:pPr algn="ctr">
+              <a:lnSpc>
+                <a:spcPts val="1320"/>
+              </a:lnSpc>
+            </a:pPr>
+            <a:r>
+              <a:rPr sz="1019" b="0">
+                <a:solidFill>
+                  <a:srgbClr val="3F4E61"/>
+                </a:solidFill>
+                <a:latin typeface="Pretendard"/>
+                <a:ea typeface="Pretendard"/>
+                <a:cs typeface="Pretendard"/>
+              </a:rPr>
+              <a:t>checks · mismatches</a:t>
+            </a:r>
+          </a:p>
+        </p:txBody>
+      </p:sp>
+      <p:sp>
+        <p:nvSpPr>
+          <p:cNvPr id="20" name="블록 verify_result"/>
+          <p:cNvSpPr/>
+          <p:nvPr/>
+        </p:nvSpPr>
+        <p:spPr>
+          <a:xfrm>
+            <a:off x="8412480" y="2682240"/>
+            <a:ext cx="1569720" cy="685800"/>
+          </a:xfrm>
+          <a:prstGeom prst="roundRect">
+            <a:avLst>
+              <a:gd name="adj" fmla="val 13333"/>
+            </a:avLst>
+          </a:prstGeom>
+          <a:solidFill>
+            <a:srgbClr val="FFFFFF"/>
+          </a:solidFill>
+          <a:ln w="13716">
+            <a:solidFill>
+              <a:srgbClr val="9DD3B8"/>
+            </a:solidFill>
+          </a:ln>
+        </p:spPr>
+        <p:txBody>
+          <a:bodyPr rtlCol="0" anchor="t" lIns="45720" rIns="45720" bIns="0" wrap="none">
+            <a:noAutofit/>
+          </a:bodyPr>
+          <a:lstStyle/>
+          <a:p>
+            <a:pPr algn="ctr">
+              <a:lnSpc>
+                <a:spcPts val="1560"/>
+              </a:lnSpc>
+            </a:pPr>
+            <a:r>
+              <a:rPr sz="1200" b="1">
+                <a:solidFill>
+                  <a:srgbClr val="0B3D2E"/>
+                </a:solidFill>
+                <a:latin typeface="Pretendard"/>
+                <a:ea typeface="Pretendard"/>
+                <a:cs typeface="Pretendard"/>
+              </a:rPr>
+              <a:t>verify_result</a:t>
+            </a:r>
+          </a:p>
+          <a:p>
+            <a:pPr algn="ctr">
+              <a:lnSpc>
+                <a:spcPts val="1320"/>
+              </a:lnSpc>
+            </a:pPr>
+            <a:r>
+              <a:rPr sz="1019" b="0">
+                <a:solidFill>
+                  <a:srgbClr val="3F4E61"/>
+                </a:solidFill>
+                <a:latin typeface="Pretendard"/>
+                <a:ea typeface="Pretendard"/>
+                <a:cs typeface="Pretendard"/>
+              </a:rPr>
+              <a:t>건수·합계·해시</a:t>
+            </a:r>
+          </a:p>
+          <a:p>
+            <a:pPr algn="ctr">
+              <a:lnSpc>
+                <a:spcPts val="1320"/>
+              </a:lnSpc>
+            </a:pPr>
+            <a:r>
+              <a:rPr sz="1019" b="0">
+                <a:solidFill>
+                  <a:srgbClr val="3F4E61"/>
+                </a:solidFill>
+                <a:latin typeface="Pretendard"/>
+                <a:ea typeface="Pretendard"/>
+                <a:cs typeface="Pretendard"/>
+              </a:rPr>
+              <a:t>숫자만</a:t>
+            </a:r>
+          </a:p>
+        </p:txBody>
+      </p:sp>
+      <p:sp>
+        <p:nvSpPr>
+          <p:cNvPr id="21" name="블록 verify_row_diff"/>
+          <p:cNvSpPr/>
+          <p:nvPr/>
+        </p:nvSpPr>
+        <p:spPr>
+          <a:xfrm>
+            <a:off x="10058400" y="2682240"/>
+            <a:ext cx="1569720" cy="685800"/>
+          </a:xfrm>
+          <a:prstGeom prst="roundRect">
+            <a:avLst>
+              <a:gd name="adj" fmla="val 13333"/>
+            </a:avLst>
+          </a:prstGeom>
+          <a:solidFill>
+            <a:srgbClr val="FFFFFF"/>
+          </a:solidFill>
+          <a:ln w="13716">
+            <a:solidFill>
+              <a:srgbClr val="9DD3B8"/>
+            </a:solidFill>
+          </a:ln>
+        </p:spPr>
+        <p:txBody>
+          <a:bodyPr rtlCol="0" anchor="t" lIns="45720" rIns="45720" bIns="0" wrap="none">
+            <a:noAutofit/>
+          </a:bodyPr>
+          <a:lstStyle/>
+          <a:p>
+            <a:pPr algn="ctr">
+              <a:lnSpc>
+                <a:spcPts val="1560"/>
+              </a:lnSpc>
+            </a:pPr>
+            <a:r>
+              <a:rPr sz="1200" b="1">
+                <a:solidFill>
+                  <a:srgbClr val="0B3D2E"/>
+                </a:solidFill>
+                <a:latin typeface="Pretendard"/>
+                <a:ea typeface="Pretendard"/>
+                <a:cs typeface="Pretendard"/>
+              </a:rPr>
+              <a:t>verify_row_diff</a:t>
+            </a:r>
+          </a:p>
+          <a:p>
+            <a:pPr algn="ctr">
+              <a:lnSpc>
+                <a:spcPts val="1320"/>
+              </a:lnSpc>
+            </a:pPr>
+            <a:r>
+              <a:rPr sz="1019" b="0">
+                <a:solidFill>
+                  <a:srgbClr val="3F4E61"/>
+                </a:solidFill>
+                <a:latin typeface="Pretendard"/>
+                <a:ea typeface="Pretendard"/>
+                <a:cs typeface="Pretendard"/>
+              </a:rPr>
+              <a:t>PK 값만</a:t>
+            </a:r>
+          </a:p>
+          <a:p>
+            <a:pPr algn="ctr">
+              <a:lnSpc>
+                <a:spcPts val="1320"/>
+              </a:lnSpc>
+            </a:pPr>
+            <a:r>
+              <a:rPr sz="1019" b="0">
+                <a:solidFill>
+                  <a:srgbClr val="3F4E61"/>
+                </a:solidFill>
+                <a:latin typeface="Pretendard"/>
+                <a:ea typeface="Pretendard"/>
+                <a:cs typeface="Pretendard"/>
+              </a:rPr>
+              <a:t>missing·extra·diff</a:t>
+            </a:r>
+          </a:p>
+        </p:txBody>
+      </p:sp>
+      <p:sp>
+        <p:nvSpPr>
+          <p:cNvPr id="22" name="블록 cutover_run"/>
+          <p:cNvSpPr/>
+          <p:nvPr/>
+        </p:nvSpPr>
+        <p:spPr>
+          <a:xfrm>
+            <a:off x="8412480" y="3810000"/>
+            <a:ext cx="3215640" cy="685800"/>
+          </a:xfrm>
+          <a:prstGeom prst="roundRect">
+            <a:avLst>
+              <a:gd name="adj" fmla="val 13333"/>
+            </a:avLst>
+          </a:prstGeom>
+          <a:solidFill>
+            <a:srgbClr val="FFFFFF"/>
+          </a:solidFill>
+          <a:ln w="13716">
+            <a:solidFill>
+              <a:srgbClr val="9DD3B8"/>
+            </a:solidFill>
+          </a:ln>
+        </p:spPr>
+        <p:txBody>
+          <a:bodyPr rtlCol="0" anchor="t" lIns="45720" rIns="45720" bIns="0" wrap="none">
+            <a:noAutofit/>
+          </a:bodyPr>
+          <a:lstStyle/>
+          <a:p>
+            <a:pPr algn="ctr">
+              <a:lnSpc>
+                <a:spcPts val="1560"/>
+              </a:lnSpc>
+            </a:pPr>
+            <a:r>
+              <a:rPr sz="1200" b="1">
+                <a:solidFill>
+                  <a:srgbClr val="0B3D2E"/>
+                </a:solidFill>
+                <a:latin typeface="Pretendard"/>
+                <a:ea typeface="Pretendard"/>
+                <a:cs typeface="Pretendard"/>
+              </a:rPr>
+              <a:t>cutover_run</a:t>
+            </a:r>
+          </a:p>
+          <a:p>
+            <a:pPr algn="ctr">
+              <a:lnSpc>
+                <a:spcPts val="1320"/>
+              </a:lnSpc>
+            </a:pPr>
+            <a:r>
+              <a:rPr sz="1019" b="0">
+                <a:solidFill>
+                  <a:srgbClr val="3F4E61"/>
+                </a:solidFill>
+                <a:latin typeface="Pretendard"/>
+                <a:ea typeface="Pretendard"/>
+                <a:cs typeface="Pretendard"/>
+              </a:rPr>
+              <a:t>PK cutover_id · FK job_id</a:t>
+            </a:r>
+          </a:p>
+          <a:p>
+            <a:pPr algn="ctr">
+              <a:lnSpc>
+                <a:spcPts val="1320"/>
+              </a:lnSpc>
+            </a:pPr>
+            <a:r>
+              <a:rPr sz="1019" b="0">
+                <a:solidFill>
+                  <a:srgbClr val="3F4E61"/>
+                </a:solidFill>
+                <a:latin typeface="Pretendard"/>
+                <a:ea typeface="Pretendard"/>
+                <a:cs typeface="Pretendard"/>
+              </a:rPr>
+              <a:t>elapsed_ms = 예상 다운타임</a:t>
+            </a:r>
+          </a:p>
+        </p:txBody>
+      </p:sp>
+      <p:sp>
+        <p:nvSpPr>
+          <p:cNvPr id="23" name="블록 cutover_step"/>
+          <p:cNvSpPr/>
+          <p:nvPr/>
+        </p:nvSpPr>
+        <p:spPr>
+          <a:xfrm>
+            <a:off x="8412480" y="4876800"/>
+            <a:ext cx="3215640" cy="685800"/>
+          </a:xfrm>
+          <a:prstGeom prst="roundRect">
+            <a:avLst>
+              <a:gd name="adj" fmla="val 13333"/>
+            </a:avLst>
+          </a:prstGeom>
+          <a:solidFill>
+            <a:srgbClr val="FFFFFF"/>
+          </a:solidFill>
+          <a:ln w="13716">
+            <a:solidFill>
+              <a:srgbClr val="9DD3B8"/>
+            </a:solidFill>
+          </a:ln>
+        </p:spPr>
+        <p:txBody>
+          <a:bodyPr rtlCol="0" anchor="t" lIns="45720" rIns="45720" bIns="0" wrap="none">
+            <a:noAutofit/>
+          </a:bodyPr>
+          <a:lstStyle/>
+          <a:p>
+            <a:pPr algn="ctr">
+              <a:lnSpc>
+                <a:spcPts val="1560"/>
+              </a:lnSpc>
+            </a:pPr>
+            <a:r>
+              <a:rPr sz="1200" b="1">
+                <a:solidFill>
+                  <a:srgbClr val="0B3D2E"/>
+                </a:solidFill>
+                <a:latin typeface="Pretendard"/>
+                <a:ea typeface="Pretendard"/>
+                <a:cs typeface="Pretendard"/>
+              </a:rPr>
+              <a:t>cutover_step</a:t>
+            </a:r>
+          </a:p>
+          <a:p>
+            <a:pPr algn="ctr">
+              <a:lnSpc>
+                <a:spcPts val="1320"/>
+              </a:lnSpc>
+            </a:pPr>
+            <a:r>
+              <a:rPr sz="1019" b="0">
+                <a:solidFill>
+                  <a:srgbClr val="3F4E61"/>
+                </a:solidFill>
+                <a:latin typeface="Pretendard"/>
+                <a:ea typeface="Pretendard"/>
+                <a:cs typeface="Pretendard"/>
+              </a:rPr>
+              <a:t>PK (cutover_id, step_no)</a:t>
+            </a:r>
+          </a:p>
+          <a:p>
+            <a:pPr algn="ctr">
+              <a:lnSpc>
+                <a:spcPts val="1320"/>
+              </a:lnSpc>
+            </a:pPr>
+            <a:r>
+              <a:rPr sz="1019" b="0">
+                <a:solidFill>
+                  <a:srgbClr val="3F4E61"/>
+                </a:solidFill>
+                <a:latin typeface="Pretendard"/>
+                <a:ea typeface="Pretendard"/>
+                <a:cs typeface="Pretendard"/>
+              </a:rPr>
+              <a:t>drain → reload → … → fk</a:t>
+            </a:r>
+          </a:p>
+        </p:txBody>
+      </p:sp>
+      <p:cxnSp>
+        <p:nvCxnSpPr>
+          <p:cNvPr id="24" name="연결 wm→job"/>
+          <p:cNvCxnSpPr>
+            <a:stCxn id="10" idx="0"/>
+          </p:cNvCxnSpPr>
+          <p:nvPr/>
+        </p:nvCxnSpPr>
+        <p:spPr>
+          <a:xfrm flipV="1">
+            <a:off x="4983480" y="2240280"/>
+            <a:ext cx="0" cy="441960"/>
+          </a:xfrm>
+          <a:prstGeom prst="line">
+            <a:avLst/>
+          </a:prstGeom>
+          <a:ln w="16764">
+            <a:solidFill>
+              <a:srgbClr val="1E6B4F"/>
+            </a:solidFill>
+            <a:tailEnd type="triangle" w="med" len="med"/>
+          </a:ln>
+        </p:spPr>
+      </p:cxnSp>
+      <p:cxnSp>
+        <p:nvCxnSpPr>
+          <p:cNvPr id="25" name="연결 cl→job"/>
+          <p:cNvCxnSpPr>
+            <a:stCxn id="11" idx="0"/>
+            <a:endCxn id="9" idx="2"/>
+          </p:cNvCxnSpPr>
+          <p:nvPr/>
+        </p:nvCxnSpPr>
+        <p:spPr>
+          <a:xfrm flipV="1">
+            <a:off x="6096000" y="2240280"/>
+            <a:ext cx="0" cy="441960"/>
+          </a:xfrm>
+          <a:prstGeom prst="line">
+            <a:avLst/>
+          </a:prstGeom>
+          <a:ln w="16764">
+            <a:solidFill>
+              <a:srgbClr val="1E6B4F"/>
+            </a:solidFill>
+            <a:tailEnd type="triangle" w="med" len="med"/>
+          </a:ln>
+        </p:spPr>
+      </p:cxnSp>
+      <p:cxnSp>
+        <p:nvCxnSpPr>
+          <p:cNvPr id="26" name="연결 ev→job"/>
+          <p:cNvCxnSpPr>
+            <a:stCxn id="12" idx="0"/>
+          </p:cNvCxnSpPr>
+          <p:nvPr/>
+        </p:nvCxnSpPr>
+        <p:spPr>
+          <a:xfrm flipV="1">
+            <a:off x="7208520" y="2240280"/>
+            <a:ext cx="0" cy="441960"/>
+          </a:xfrm>
+          <a:prstGeom prst="line">
+            <a:avLst/>
+          </a:prstGeom>
+          <a:ln w="16764">
+            <a:solidFill>
+              <a:srgbClr val="1E6B4F"/>
+            </a:solidFill>
+            <a:tailEnd type="triangle" w="med" len="med"/>
+          </a:ln>
+        </p:spPr>
+      </p:cxnSp>
+      <p:cxnSp>
+        <p:nvCxnSpPr>
+          <p:cNvPr id="27" name="연결 jt→job"/>
+          <p:cNvCxnSpPr>
+            <a:stCxn id="15" idx="3"/>
+            <a:endCxn id="9" idx="1"/>
+          </p:cNvCxnSpPr>
+          <p:nvPr/>
+        </p:nvCxnSpPr>
+        <p:spPr>
+          <a:xfrm>
+            <a:off x="3779520" y="1897380"/>
+            <a:ext cx="716280" cy="0"/>
+          </a:xfrm>
+          <a:prstGeom prst="line">
+            <a:avLst/>
+          </a:prstGeom>
+          <a:ln w="16764">
+            <a:solidFill>
+              <a:srgbClr val="1E6B4F"/>
+            </a:solidFill>
+            <a:tailEnd type="triangle" w="med" len="med"/>
+          </a:ln>
+        </p:spPr>
+      </p:cxnSp>
+      <p:cxnSp>
+        <p:nvCxnSpPr>
+          <p:cNvPr id="28" name="연결 lc→jt"/>
+          <p:cNvCxnSpPr>
+            <a:stCxn id="16" idx="0"/>
+            <a:endCxn id="15" idx="2"/>
+          </p:cNvCxnSpPr>
+          <p:nvPr/>
+        </p:nvCxnSpPr>
+        <p:spPr>
+          <a:xfrm flipV="1">
+            <a:off x="2171700" y="2240280"/>
+            <a:ext cx="0" cy="441960"/>
+          </a:xfrm>
+          <a:prstGeom prst="line">
+            <a:avLst/>
+          </a:prstGeom>
+          <a:ln w="16764">
+            <a:solidFill>
+              <a:srgbClr val="1E6B4F"/>
+            </a:solidFill>
+            <a:tailEnd type="triangle" w="med" len="med"/>
+          </a:ln>
+        </p:spPr>
+      </p:cxnSp>
+      <p:cxnSp>
+        <p:nvCxnSpPr>
+          <p:cNvPr id="29" name="연결 vr→job"/>
+          <p:cNvCxnSpPr>
+            <a:stCxn id="19" idx="1"/>
+            <a:endCxn id="9" idx="3"/>
+          </p:cNvCxnSpPr>
+          <p:nvPr/>
+        </p:nvCxnSpPr>
+        <p:spPr>
+          <a:xfrm flipH="1">
+            <a:off x="7696200" y="1897380"/>
+            <a:ext cx="716280" cy="0"/>
+          </a:xfrm>
+          <a:prstGeom prst="line">
+            <a:avLst/>
+          </a:prstGeom>
+          <a:ln w="16764">
+            <a:solidFill>
+              <a:srgbClr val="1E6B4F"/>
+            </a:solidFill>
+            <a:tailEnd type="triangle" w="med" len="med"/>
+          </a:ln>
+        </p:spPr>
+      </p:cxnSp>
+      <p:cxnSp>
+        <p:nvCxnSpPr>
+          <p:cNvPr id="30" name="연결 vres→vr"/>
+          <p:cNvCxnSpPr>
+            <a:stCxn id="20" idx="0"/>
+          </p:cNvCxnSpPr>
+          <p:nvPr/>
+        </p:nvCxnSpPr>
+        <p:spPr>
+          <a:xfrm flipV="1">
+            <a:off x="9197340" y="2240280"/>
+            <a:ext cx="0" cy="441960"/>
+          </a:xfrm>
+          <a:prstGeom prst="line">
+            <a:avLst/>
+          </a:prstGeom>
+          <a:ln w="16764">
+            <a:solidFill>
+              <a:srgbClr val="1E6B4F"/>
+            </a:solidFill>
+            <a:tailEnd type="triangle" w="med" len="med"/>
+          </a:ln>
+        </p:spPr>
+      </p:cxnSp>
+      <p:cxnSp>
+        <p:nvCxnSpPr>
+          <p:cNvPr id="31" name="연결 vdiff→vr"/>
+          <p:cNvCxnSpPr>
+            <a:stCxn id="21" idx="0"/>
+          </p:cNvCxnSpPr>
+          <p:nvPr/>
+        </p:nvCxnSpPr>
+        <p:spPr>
+          <a:xfrm flipV="1">
+            <a:off x="10843260" y="2240280"/>
+            <a:ext cx="0" cy="441960"/>
+          </a:xfrm>
+          <a:prstGeom prst="line">
+            <a:avLst/>
+          </a:prstGeom>
+          <a:ln w="16764">
+            <a:solidFill>
+              <a:srgbClr val="1E6B4F"/>
+            </a:solidFill>
+            <a:tailEnd type="triangle" w="med" len="med"/>
+          </a:ln>
+        </p:spPr>
+      </p:cxnSp>
+      <p:cxnSp>
+        <p:nvCxnSpPr>
+          <p:cNvPr id="32" name="연결 cs→cr"/>
+          <p:cNvCxnSpPr>
+            <a:stCxn id="23" idx="0"/>
+            <a:endCxn id="22" idx="2"/>
+          </p:cNvCxnSpPr>
+          <p:nvPr/>
+        </p:nvCxnSpPr>
+        <p:spPr>
+          <a:xfrm flipV="1">
+            <a:off x="10020300" y="4495800"/>
+            <a:ext cx="0" cy="381000"/>
+          </a:xfrm>
+          <a:prstGeom prst="line">
+            <a:avLst/>
+          </a:prstGeom>
+          <a:ln w="16764">
+            <a:solidFill>
+              <a:srgbClr val="1E6B4F"/>
+            </a:solidFill>
+            <a:tailEnd type="triangle" w="med" len="med"/>
+          </a:ln>
+        </p:spPr>
+      </p:cxnSp>
+      <p:cxnSp>
+        <p:nvCxnSpPr>
+          <p:cNvPr id="33" name="연결 cr→job"/>
+          <p:cNvCxnSpPr>
+            <a:stCxn id="22" idx="1"/>
+          </p:cNvCxnSpPr>
+          <p:nvPr/>
+        </p:nvCxnSpPr>
+        <p:spPr>
+          <a:xfrm flipH="1" flipV="1">
+            <a:off x="7696200" y="2080260"/>
+            <a:ext cx="716280" cy="2072640"/>
+          </a:xfrm>
+          <a:prstGeom prst="bentConnector3">
+            <a:avLst/>
+          </a:prstGeom>
+          <a:ln w="16764">
+            <a:solidFill>
+              <a:srgbClr val="1E6B4F"/>
+            </a:solidFill>
+            <a:tailEnd type="triangle" w="med" len="med"/>
+          </a:ln>
+        </p:spPr>
+      </p:cxnSp>
+      <p:sp>
+        <p:nvSpPr>
+          <p:cNvPr id="34" name="범례"/>
+          <p:cNvSpPr/>
+          <p:nvPr/>
+        </p:nvSpPr>
+        <p:spPr>
+          <a:xfrm>
+            <a:off x="381000" y="6309360"/>
+            <a:ext cx="4236339" cy="396240"/>
+          </a:xfrm>
+          <a:prstGeom prst="roundRect">
+            <a:avLst>
+              <a:gd name="adj" fmla="val 19230"/>
+            </a:avLst>
+          </a:prstGeom>
+          <a:solidFill>
+            <a:srgbClr val="FFFFFF"/>
+          </a:solidFill>
+          <a:ln w="10668">
+            <a:solidFill>
+              <a:srgbClr val="9DD3B8"/>
+            </a:solidFill>
+          </a:ln>
+        </p:spPr>
+        <p:txBody>
+          <a:bodyPr rtlCol="0" anchor="ctr"/>
+          <a:lstStyle/>
+          <a:p>
+            <a:pPr algn="ctr"/>
+          </a:p>
+        </p:txBody>
+      </p:sp>
+      <p:sp>
+        <p:nvSpPr>
+          <p:cNvPr id="35" name="범례 제목"/>
+          <p:cNvSpPr txBox="1"/>
+          <p:nvPr/>
+        </p:nvSpPr>
+        <p:spPr>
+          <a:xfrm>
+            <a:off x="518160" y="6309360"/>
+            <a:ext cx="381000" cy="396240"/>
+          </a:xfrm>
+          <a:prstGeom prst="rect">
+            <a:avLst/>
+          </a:prstGeom>
+          <a:noFill/>
+        </p:spPr>
+        <p:txBody>
+          <a:bodyPr wrap="square" lIns="0" tIns="0" rIns="0" bIns="0" anchor="ctr">
+            <a:noAutofit/>
+          </a:bodyPr>
+          <a:lstStyle/>
+          <a:p>
+            <a:pPr algn="l"/>
+            <a:r>
+              <a:rPr sz="1019" b="1">
+                <a:solidFill>
+                  <a:srgbClr val="0B3D2E"/>
+                </a:solidFill>
+                <a:latin typeface="Pretendard"/>
+                <a:ea typeface="Pretendard"/>
+                <a:cs typeface="Pretendard"/>
+              </a:rPr>
+              <a:t>범례</a:t>
+            </a:r>
+          </a:p>
+        </p:txBody>
+      </p:sp>
+      <p:cxnSp>
+        <p:nvCxnSpPr>
+          <p:cNvPr id="36" name="범례 FK 참조 (자식 → 부모, 1 : N)"/>
+          <p:cNvCxnSpPr/>
+          <p:nvPr/>
+        </p:nvCxnSpPr>
+        <p:spPr>
+          <a:xfrm>
+            <a:off x="914400" y="6507480"/>
+            <a:ext cx="350520" cy="0"/>
+          </a:xfrm>
+          <a:prstGeom prst="line">
+            <a:avLst/>
+          </a:prstGeom>
+          <a:ln w="16764">
+            <a:solidFill>
+              <a:srgbClr val="1E6B4F"/>
+            </a:solidFill>
+            <a:tailEnd type="triangle" w="med" len="med"/>
+          </a:ln>
+        </p:spPr>
+      </p:cxnSp>
+      <p:sp>
+        <p:nvSpPr>
+          <p:cNvPr id="37" name="범례 글 FK 참조 (자식 → 부모, 1 : N)"/>
+          <p:cNvSpPr txBox="1"/>
+          <p:nvPr/>
+        </p:nvSpPr>
+        <p:spPr>
+          <a:xfrm>
+            <a:off x="1341120" y="6309360"/>
+            <a:ext cx="2069592" cy="396240"/>
+          </a:xfrm>
+          <a:prstGeom prst="rect">
+            <a:avLst/>
+          </a:prstGeom>
+          <a:noFill/>
+        </p:spPr>
+        <p:txBody>
+          <a:bodyPr wrap="square" lIns="0" tIns="0" rIns="0" bIns="0" anchor="ctr">
+            <a:noAutofit/>
+          </a:bodyPr>
+          <a:lstStyle/>
+          <a:p>
+            <a:pPr algn="l"/>
+            <a:r>
+              <a:rPr sz="1019" b="1">
+                <a:solidFill>
+                  <a:srgbClr val="16202C"/>
+                </a:solidFill>
+                <a:latin typeface="Pretendard"/>
+                <a:ea typeface="Pretendard"/>
+                <a:cs typeface="Pretendard"/>
+              </a:rPr>
+              <a:t>FK 참조 (자식 → 부모, 1 : N)</a:t>
+            </a:r>
+          </a:p>
+        </p:txBody>
+      </p:sp>
+      <p:sp>
+        <p:nvSpPr>
+          <p:cNvPr id="38" name="범례 상태 코드값"/>
+          <p:cNvSpPr/>
+          <p:nvPr/>
+        </p:nvSpPr>
+        <p:spPr>
+          <a:xfrm>
+            <a:off x="3486912" y="6438900"/>
+            <a:ext cx="182880" cy="137160"/>
+          </a:xfrm>
+          <a:prstGeom prst="roundRect">
+            <a:avLst>
+              <a:gd name="adj" fmla="val 22222"/>
+            </a:avLst>
+          </a:prstGeom>
+          <a:solidFill>
+            <a:srgbClr val="D5EFE2"/>
+          </a:solidFill>
+          <a:ln w="7620">
+            <a:solidFill>
+              <a:srgbClr val="9DD3B8"/>
+            </a:solidFill>
+          </a:ln>
+        </p:spPr>
+        <p:txBody>
+          <a:bodyPr rtlCol="0" anchor="ctr"/>
+          <a:lstStyle/>
+          <a:p>
+            <a:pPr algn="ctr"/>
+          </a:p>
+        </p:txBody>
+      </p:sp>
+      <p:sp>
+        <p:nvSpPr>
+          <p:cNvPr id="39" name="범례 글 상태 코드값"/>
+          <p:cNvSpPr txBox="1"/>
+          <p:nvPr/>
+        </p:nvSpPr>
+        <p:spPr>
+          <a:xfrm>
+            <a:off x="3745992" y="6309360"/>
+            <a:ext cx="871347" cy="396240"/>
+          </a:xfrm>
+          <a:prstGeom prst="rect">
+            <a:avLst/>
+          </a:prstGeom>
+          <a:noFill/>
+        </p:spPr>
+        <p:txBody>
+          <a:bodyPr wrap="square" lIns="0" tIns="0" rIns="0" bIns="0" anchor="ctr">
+            <a:noAutofit/>
+          </a:bodyPr>
+          <a:lstStyle/>
+          <a:p>
+            <a:pPr algn="l"/>
+            <a:r>
+              <a:rPr sz="1019" b="1">
+                <a:solidFill>
+                  <a:srgbClr val="16202C"/>
+                </a:solidFill>
+                <a:latin typeface="Pretendard"/>
+                <a:ea typeface="Pretendard"/>
+                <a:cs typeface="Pretendard"/>
+              </a:rPr>
+              <a:t>상태 코드값</a:t>
+            </a:r>
+          </a:p>
+        </p:txBody>
+      </p:sp>
+      <p:sp>
+        <p:nvSpPr>
+          <p:cNvPr id="40" name="설명"/>
+          <p:cNvSpPr txBox="1"/>
+          <p:nvPr/>
+        </p:nvSpPr>
+        <p:spPr>
+          <a:xfrm>
+            <a:off x="5081016" y="6347460"/>
+            <a:ext cx="6729984" cy="190500"/>
+          </a:xfrm>
+          <a:prstGeom prst="rect">
+            <a:avLst/>
+          </a:prstGeom>
+          <a:noFill/>
+        </p:spPr>
+        <p:txBody>
+          <a:bodyPr wrap="square" lIns="0" tIns="0" rIns="0" bIns="0" anchor="ctr">
+            <a:noAutofit/>
+          </a:bodyPr>
+          <a:lstStyle/>
+          <a:p>
+            <a:pPr algn="r"/>
+            <a:r>
+              <a:rPr sz="1019" b="0">
+                <a:solidFill>
+                  <a:srgbClr val="3F4E61"/>
+                </a:solidFill>
+                <a:latin typeface="Pretendard"/>
+                <a:ea typeface="Pretendard"/>
+                <a:cs typeface="Pretendard"/>
+              </a:rPr>
+              <a:t>verify_result · verify_row_diff 는 job_table 도 참조(선 생략) · FK 는 모두 ON DELETE CASCADE</a:t>
+            </a:r>
+          </a:p>
+        </p:txBody>
+      </p:sp>
+      <p:sp>
+        <p:nvSpPr>
+          <p:cNvPr id="41" name="설명"/>
+          <p:cNvSpPr txBox="1"/>
+          <p:nvPr/>
+        </p:nvSpPr>
+        <p:spPr>
+          <a:xfrm>
+            <a:off x="6259830" y="6537960"/>
+            <a:ext cx="5551170" cy="190500"/>
+          </a:xfrm>
+          <a:prstGeom prst="rect">
+            <a:avLst/>
+          </a:prstGeom>
+          <a:noFill/>
+        </p:spPr>
+        <p:txBody>
+          <a:bodyPr wrap="square" lIns="0" tIns="0" rIns="0" bIns="0" anchor="ctr">
+            <a:noAutofit/>
+          </a:bodyPr>
+          <a:lstStyle/>
+          <a:p>
+            <a:pPr algn="r"/>
+            <a:r>
+              <a:rPr sz="1019" b="0">
+                <a:solidFill>
+                  <a:srgbClr val="3F4E61"/>
+                </a:solidFill>
+                <a:latin typeface="Pretendard"/>
+                <a:ea typeface="Pretendard"/>
+                <a:cs typeface="Pretendard"/>
+              </a:rPr>
+              <a:t>행 값은 change_log.payload 에만 두고 반영하면 바로 지운다 · 비밀번호 컬럼 없음</a:t>
+            </a:r>
+          </a:p>
+        </p:txBody>
+      </p:sp>
+    </p:spTree>
+  </p:cSld>
+  <p:clrMapOvr>
+    <a:masterClrMapping/>
+  </p:clrMapOvr>
+</p:sld>
+</file>
+
+<file path=ppt/slides/slide2.xml><?xml version="1.0" encoding="utf-8"?>
+<p:sld xmlns:a="http://schemas.openxmlformats.org/drawingml/2006/main" xmlns:p="http://schemas.openxmlformats.org/presentationml/2006/main" xmlns:r="http://schemas.openxmlformats.org/officeDocument/2006/relationships">
+  <p:cSld>
+    <p:bg>
+      <p:bgPr>
+        <a:solidFill>
+          <a:srgbClr val="FFFFFF"/>
+        </a:solidFill>
+        <a:effectLst/>
+      </p:bgPr>
+    </p:bg>
+    <p:spTree>
+      <p:nvGrpSpPr>
+        <p:cNvPr id="1" name=""/>
+        <p:cNvGrpSpPr/>
+        <p:nvPr/>
+      </p:nvGrpSpPr>
+      <p:grpSpPr/>
+      <p:sp>
+        <p:nvSpPr>
+          <p:cNvPr id="2" name="제목 막대"/>
+          <p:cNvSpPr/>
+          <p:nvPr/>
+        </p:nvSpPr>
+        <p:spPr>
+          <a:xfrm>
+            <a:off x="381000" y="274320"/>
+            <a:ext cx="53340" cy="548640"/>
+          </a:xfrm>
+          <a:prstGeom prst="roundRect">
+            <a:avLst>
+              <a:gd name="adj" fmla="val 50000"/>
+            </a:avLst>
+          </a:prstGeom>
+          <a:solidFill>
+            <a:srgbClr val="1E6B4F"/>
+          </a:solidFill>
+          <a:ln>
+            <a:noFill/>
+          </a:ln>
+        </p:spPr>
+        <p:txBody>
+          <a:bodyPr rtlCol="0" anchor="ctr"/>
+          <a:lstStyle/>
+          <a:p>
+            <a:pPr algn="ctr"/>
+          </a:p>
+        </p:txBody>
+      </p:sp>
+      <p:sp>
+        <p:nvSpPr>
+          <p:cNvPr id="3" name="제목"/>
+          <p:cNvSpPr txBox="1"/>
+          <p:nvPr/>
+        </p:nvSpPr>
+        <p:spPr>
+          <a:xfrm>
+            <a:off x="533400" y="228600"/>
+            <a:ext cx="8001000" cy="365760"/>
+          </a:xfrm>
+          <a:prstGeom prst="rect">
+            <a:avLst/>
+          </a:prstGeom>
+          <a:noFill/>
+        </p:spPr>
+        <p:txBody>
+          <a:bodyPr wrap="square" lIns="0" tIns="0" rIns="0" bIns="0" anchor="ctr">
+            <a:noAutofit/>
+          </a:bodyPr>
+          <a:lstStyle/>
+          <a:p>
+            <a:pPr algn="l"/>
+            <a:r>
+              <a:rPr sz="2160" b="1">
+                <a:solidFill>
+                  <a:srgbClr val="0B3D2E"/>
+                </a:solidFill>
+                <a:latin typeface="Pretendard"/>
+                <a:ea typeface="Pretendard"/>
+                <a:cs typeface="Pretendard"/>
+              </a:rPr>
+              <a:t>KDMS 관리 테이블 논리 ERD (2/4)</a:t>
+            </a:r>
+          </a:p>
+        </p:txBody>
+      </p:sp>
+      <p:sp>
+        <p:nvSpPr>
+          <p:cNvPr id="4" name="부제"/>
+          <p:cNvSpPr txBox="1"/>
+          <p:nvPr/>
+        </p:nvSpPr>
+        <p:spPr>
+          <a:xfrm>
+            <a:off x="533400" y="640080"/>
+            <a:ext cx="9144000" cy="182880"/>
+          </a:xfrm>
+          <a:prstGeom prst="rect">
+            <a:avLst/>
+          </a:prstGeom>
+          <a:noFill/>
+        </p:spPr>
+        <p:txBody>
+          <a:bodyPr wrap="square" lIns="0" tIns="0" rIns="0" bIns="0" anchor="ctr">
+            <a:noAutofit/>
+          </a:bodyPr>
+          <a:lstStyle/>
+          <a:p>
+            <a:pPr algn="l"/>
+            <a:r>
+              <a:rPr sz="1080" b="0">
+                <a:solidFill>
+                  <a:srgbClr val="3F4E61"/>
+                </a:solidFill>
+                <a:latin typeface="Pretendard"/>
+                <a:ea typeface="Pretendard"/>
+                <a:cs typeface="Pretendard"/>
+              </a:rPr>
+              <a:t>엔터티·관계·핵심 속성 · 머리 오른쪽은 물리 테이블 이름 · 컬럼·타입 전체는 3·4장 물리 ERD</a:t>
+            </a:r>
+          </a:p>
+        </p:txBody>
+      </p:sp>
+      <p:sp>
+        <p:nvSpPr>
+          <p:cNvPr id="5" name="문서 정보"/>
+          <p:cNvSpPr txBox="1"/>
+          <p:nvPr/>
+        </p:nvSpPr>
+        <p:spPr>
+          <a:xfrm>
+            <a:off x="8382000" y="411480"/>
+            <a:ext cx="3429000" cy="167640"/>
+          </a:xfrm>
+          <a:prstGeom prst="rect">
+            <a:avLst/>
+          </a:prstGeom>
+          <a:noFill/>
+        </p:spPr>
+        <p:txBody>
+          <a:bodyPr wrap="square" lIns="0" tIns="0" rIns="0" bIns="0" anchor="ctr">
+            <a:noAutofit/>
+          </a:bodyPr>
+          <a:lstStyle/>
+          <a:p>
+            <a:pPr algn="r"/>
+            <a:r>
+              <a:rPr sz="1019" b="0">
+                <a:solidFill>
+                  <a:srgbClr val="3F4E61"/>
+                </a:solidFill>
+                <a:latin typeface="Pretendard"/>
+                <a:ea typeface="Pretendard"/>
+                <a:cs typeface="Pretendard"/>
+              </a:rPr>
+              <a:t>KDMS-D05 · v0.4 · 2026-10-09 · 2/4</a:t>
             </a:r>
           </a:p>
         </p:txBody>
@@ -14811,7 +16992,7 @@
 </p:sld>
 </file>
 
-<file path=ppt/slides/slide2.xml><?xml version="1.0" encoding="utf-8"?>
+<file path=ppt/slides/slide3.xml><?xml version="1.0" encoding="utf-8"?>
 <p:sld xmlns:a="http://schemas.openxmlformats.org/drawingml/2006/main" xmlns:p="http://schemas.openxmlformats.org/presentationml/2006/main" xmlns:r="http://schemas.openxmlformats.org/officeDocument/2006/relationships">
   <p:cSld>
     <p:bg>
@@ -14892,7 +17073,7 @@
                 <a:ea typeface="Pretendard"/>
                 <a:cs typeface="Pretendard"/>
               </a:rPr>
-              <a:t>KDMS 관리 테이블 물리 ERD (2/3) 작업·적재·동기화</a:t>
+              <a:t>KDMS 관리 테이블 물리 ERD (3/4) 작업·적재·동기화</a:t>
             </a:r>
           </a:p>
         </p:txBody>
@@ -14966,7 +17147,7 @@
                 <a:ea typeface="Pretendard"/>
                 <a:cs typeface="Pretendard"/>
               </a:rPr>
-              <a:t>KDMS-D05 · v0.3 · 2026-10-09 · 2/3</a:t>
+              <a:t>KDMS-D05 · v0.4 · 2026-10-09 · 3/4</a:t>
             </a:r>
           </a:p>
         </p:txBody>
@@ -22808,7 +24989,7 @@
 </p:sld>
 </file>
 
-<file path=ppt/slides/slide3.xml><?xml version="1.0" encoding="utf-8"?>
+<file path=ppt/slides/slide4.xml><?xml version="1.0" encoding="utf-8"?>
 <p:sld xmlns:a="http://schemas.openxmlformats.org/drawingml/2006/main" xmlns:p="http://schemas.openxmlformats.org/presentationml/2006/main" xmlns:r="http://schemas.openxmlformats.org/officeDocument/2006/relationships">
   <p:cSld>
     <p:bg>
@@ -22889,7 +25070,7 @@
                 <a:ea typeface="Pretendard"/>
                 <a:cs typeface="Pretendard"/>
               </a:rPr>
-              <a:t>KDMS 관리 테이블 물리 ERD (3/3) 검증·전환·기록</a:t>
+              <a:t>KDMS 관리 테이블 물리 ERD (4/4) 검증·전환·기록</a:t>
             </a:r>
           </a:p>
         </p:txBody>
@@ -22926,7 +25107,7 @@
                 <a:ea typeface="Pretendard"/>
                 <a:cs typeface="Pretendard"/>
               </a:rPr>
-              <a:t>점선 테두리 = 2장 엔터티를 참조로 다시 그림(PK 만) · 컬럼 정의는 docs/database.md</a:t>
+              <a:t>점선 테두리 = 3장 엔터티를 참조로 다시 그림(PK 만) · 컬럼 정의는 docs/database.md</a:t>
             </a:r>
           </a:p>
         </p:txBody>
@@ -22963,7 +25144,7 @@
                 <a:ea typeface="Pretendard"/>
                 <a:cs typeface="Pretendard"/>
               </a:rPr>
-              <a:t>KDMS-D05 · v0.3 · 2026-10-09 · 3/3</a:t>
+              <a:t>KDMS-D05 · v0.4 · 2026-10-09 · 4/4</a:t>
             </a:r>
           </a:p>
         </p:txBody>
@@ -26785,7 +28966,7 @@
                   <a:ea typeface="Pretendard"/>
                   <a:cs typeface="Pretendard"/>
                 </a:rPr>
-                <a:t>나머지 컬럼은 2장</a:t>
+                <a:t>나머지 컬럼은 3장</a:t>
               </a:r>
             </a:p>
           </p:txBody>
@@ -27269,7 +29450,7 @@
                   <a:ea typeface="Pretendard"/>
                   <a:cs typeface="Pretendard"/>
                 </a:rPr>
-                <a:t>나머지 컬럼은 2장</a:t>
+                <a:t>나머지 컬럼은 3장</a:t>
               </a:r>
             </a:p>
           </p:txBody>
